--- a/Paper_Soccer_AI_presentation.pptx
+++ b/Paper_Soccer_AI_presentation.pptx
@@ -118,6 +118,82 @@
     </p:ext>
   </p:extLst>
 </p:presentation>
+</file>
+
+<file path=ppt/revisionInfo.xml><?xml version="1.0" encoding="utf-8"?>
+<p1510:revInfo xmlns:a="http://schemas.openxmlformats.org/drawingml/2006/main" xmlns:r="http://schemas.openxmlformats.org/officeDocument/2006/relationships" xmlns:p1510="http://schemas.microsoft.com/office/powerpoint/2015/10/main">
+  <p1510:revLst>
+    <p1510:client id="{167319C4-0669-4062-B710-E4A47D53BF05}" v="11" dt="2026-06-18T07:28:21.565"/>
+  </p1510:revLst>
+</p1510:revInfo>
+</file>
+
+<file path=ppt/changesInfos/changesInfo1.xml><?xml version="1.0" encoding="utf-8"?>
+<pc:chgInfo xmlns:a="http://schemas.openxmlformats.org/drawingml/2006/main" xmlns:r="http://schemas.openxmlformats.org/officeDocument/2006/relationships" xmlns:ac="http://schemas.microsoft.com/office/drawing/2013/main/command" xmlns:pc="http://schemas.microsoft.com/office/powerpoint/2013/main/command">
+  <pc:docChgLst>
+    <pc:chgData name="Patryk Kuna" userId="efbc53b83e3a64ac" providerId="LiveId" clId="{1A3CA3ED-7A5B-4850-96D7-7D3CECB0AE9A}"/>
+    <pc:docChg chg="undo custSel modSld">
+      <pc:chgData name="Patryk Kuna" userId="efbc53b83e3a64ac" providerId="LiveId" clId="{1A3CA3ED-7A5B-4850-96D7-7D3CECB0AE9A}" dt="2026-06-18T07:28:23.304" v="73"/>
+      <pc:docMkLst>
+        <pc:docMk/>
+      </pc:docMkLst>
+      <pc:sldChg chg="modSp mod">
+        <pc:chgData name="Patryk Kuna" userId="efbc53b83e3a64ac" providerId="LiveId" clId="{1A3CA3ED-7A5B-4850-96D7-7D3CECB0AE9A}" dt="2026-06-18T07:18:37.025" v="71" actId="20577"/>
+        <pc:sldMkLst>
+          <pc:docMk/>
+          <pc:sldMk cId="0" sldId="261"/>
+        </pc:sldMkLst>
+        <pc:spChg chg="mod">
+          <ac:chgData name="Patryk Kuna" userId="efbc53b83e3a64ac" providerId="LiveId" clId="{1A3CA3ED-7A5B-4850-96D7-7D3CECB0AE9A}" dt="2026-06-18T07:17:08.489" v="29" actId="255"/>
+          <ac:spMkLst>
+            <pc:docMk/>
+            <pc:sldMk cId="0" sldId="261"/>
+            <ac:spMk id="23" creationId="{00000000-0000-0000-0000-000000000000}"/>
+          </ac:spMkLst>
+        </pc:spChg>
+        <pc:spChg chg="mod">
+          <ac:chgData name="Patryk Kuna" userId="efbc53b83e3a64ac" providerId="LiveId" clId="{1A3CA3ED-7A5B-4850-96D7-7D3CECB0AE9A}" dt="2026-06-18T07:17:03.015" v="28" actId="255"/>
+          <ac:spMkLst>
+            <pc:docMk/>
+            <pc:sldMk cId="0" sldId="261"/>
+            <ac:spMk id="26" creationId="{00000000-0000-0000-0000-000000000000}"/>
+          </ac:spMkLst>
+        </pc:spChg>
+        <pc:spChg chg="mod">
+          <ac:chgData name="Patryk Kuna" userId="efbc53b83e3a64ac" providerId="LiveId" clId="{1A3CA3ED-7A5B-4850-96D7-7D3CECB0AE9A}" dt="2026-06-18T07:16:48.641" v="25" actId="14100"/>
+          <ac:spMkLst>
+            <pc:docMk/>
+            <pc:sldMk cId="0" sldId="261"/>
+            <ac:spMk id="27" creationId="{00000000-0000-0000-0000-000000000000}"/>
+          </ac:spMkLst>
+        </pc:spChg>
+        <pc:spChg chg="mod">
+          <ac:chgData name="Patryk Kuna" userId="efbc53b83e3a64ac" providerId="LiveId" clId="{1A3CA3ED-7A5B-4850-96D7-7D3CECB0AE9A}" dt="2026-06-18T07:18:37.025" v="71" actId="20577"/>
+          <ac:spMkLst>
+            <pc:docMk/>
+            <pc:sldMk cId="0" sldId="261"/>
+            <ac:spMk id="29" creationId="{00000000-0000-0000-0000-000000000000}"/>
+          </ac:spMkLst>
+        </pc:spChg>
+      </pc:sldChg>
+      <pc:sldChg chg="modSp mod">
+        <pc:chgData name="Patryk Kuna" userId="efbc53b83e3a64ac" providerId="LiveId" clId="{1A3CA3ED-7A5B-4850-96D7-7D3CECB0AE9A}" dt="2026-06-18T07:28:23.304" v="73"/>
+        <pc:sldMkLst>
+          <pc:docMk/>
+          <pc:sldMk cId="0" sldId="262"/>
+        </pc:sldMkLst>
+        <pc:spChg chg="mod">
+          <ac:chgData name="Patryk Kuna" userId="efbc53b83e3a64ac" providerId="LiveId" clId="{1A3CA3ED-7A5B-4850-96D7-7D3CECB0AE9A}" dt="2026-06-18T07:28:23.304" v="73"/>
+          <ac:spMkLst>
+            <pc:docMk/>
+            <pc:sldMk cId="0" sldId="262"/>
+            <ac:spMk id="22" creationId="{00000000-0000-0000-0000-000000000000}"/>
+          </ac:spMkLst>
+        </pc:spChg>
+      </pc:sldChg>
+    </pc:docChg>
+  </pc:docChgLst>
+</pc:chgInfo>
 </file>
 
 <file path=ppt/notesMasters/notesMaster1.xml><?xml version="1.0" encoding="utf-8"?>
@@ -6138,7 +6214,7 @@
         </p:spPr>
         <p:txBody>
           <a:bodyPr wrap="square" lIns="254" tIns="254" rIns="254" bIns="254" rtlCol="0" anchor="ctr">
-            <a:normAutofit lnSpcReduction="10000"/>
+            <a:noAutofit/>
           </a:bodyPr>
           <a:lstStyle/>
           <a:p>
@@ -6146,7 +6222,7 @@
               <a:buNone/>
             </a:pPr>
             <a:r>
-              <a:rPr lang="en-US" sz="1350" noProof="1">
+              <a:rPr lang="en-US" sz="1300" noProof="1">
                 <a:solidFill>
                   <a:srgbClr val="F8FAFC"/>
                 </a:solidFill>
@@ -6156,14 +6232,14 @@
               </a:rPr>
               <a:t>games_count = 10000</a:t>
             </a:r>
-            <a:endParaRPr lang="en-US" sz="1350" noProof="1"/>
+            <a:endParaRPr lang="en-US" sz="1300" noProof="1"/>
           </a:p>
           <a:p>
             <a:pPr marL="0" indent="0">
               <a:buNone/>
             </a:pPr>
             <a:r>
-              <a:rPr lang="en-US" sz="1350" noProof="1">
+              <a:rPr lang="en-US" sz="1300" noProof="1">
                 <a:solidFill>
                   <a:srgbClr val="F8FAFC"/>
                 </a:solidFill>
@@ -6173,14 +6249,14 @@
               </a:rPr>
               <a:t>max_moves = 400</a:t>
             </a:r>
-            <a:endParaRPr lang="en-US" sz="1350" noProof="1"/>
+            <a:endParaRPr lang="en-US" sz="1300" noProof="1"/>
           </a:p>
           <a:p>
             <a:pPr marL="0" indent="0">
               <a:buNone/>
             </a:pPr>
             <a:r>
-              <a:rPr lang="en-US" sz="1350" noProof="1">
+              <a:rPr lang="en-US" sz="1300" noProof="1">
                 <a:solidFill>
                   <a:srgbClr val="F8FAFC"/>
                 </a:solidFill>
@@ -6190,14 +6266,14 @@
               </a:rPr>
               <a:t>epsilon = 0.30</a:t>
             </a:r>
-            <a:endParaRPr lang="en-US" sz="1350" noProof="1"/>
+            <a:endParaRPr lang="en-US" sz="1300" noProof="1"/>
           </a:p>
           <a:p>
             <a:pPr marL="0" indent="0">
               <a:buNone/>
             </a:pPr>
             <a:r>
-              <a:rPr lang="en-US" sz="1350" noProof="1">
+              <a:rPr lang="en-US" sz="1300" noProof="1">
                 <a:solidFill>
                   <a:srgbClr val="F8FAFC"/>
                 </a:solidFill>
@@ -6207,7 +6283,7 @@
               </a:rPr>
               <a:t>expert_depth = 5</a:t>
             </a:r>
-            <a:endParaRPr lang="en-US" sz="1350" noProof="1"/>
+            <a:endParaRPr lang="en-US" sz="1300" noProof="1"/>
           </a:p>
         </p:txBody>
       </p:sp>
@@ -6305,7 +6381,7 @@
           <a:lstStyle/>
           <a:p>
             <a:r>
-              <a:rPr lang="en-US" sz="1350" noProof="1">
+              <a:rPr lang="en-US" sz="1300" noProof="1">
                 <a:solidFill>
                   <a:srgbClr val="B7C0D1"/>
                 </a:solidFill>
@@ -6314,14 +6390,14 @@
               </a:rPr>
               <a:t>70% best expert move</a:t>
             </a:r>
-            <a:endParaRPr lang="en-US" sz="1350" noProof="1">
+            <a:endParaRPr lang="en-US" sz="1300" noProof="1">
               <a:latin typeface="Courier New" panose="02070309020205020404" pitchFamily="49" charset="0"/>
               <a:cs typeface="Courier New" panose="02070309020205020404" pitchFamily="49" charset="0"/>
             </a:endParaRPr>
           </a:p>
           <a:p>
             <a:r>
-              <a:rPr lang="en-US" sz="1350" noProof="1">
+              <a:rPr lang="en-US" sz="1300" noProof="1">
                 <a:solidFill>
                   <a:srgbClr val="B7C0D1"/>
                 </a:solidFill>
@@ -6330,7 +6406,7 @@
               </a:rPr>
               <a:t>30% random legal move</a:t>
             </a:r>
-            <a:endParaRPr lang="en-US" sz="1350" noProof="1">
+            <a:endParaRPr lang="en-US" sz="1300" noProof="1">
               <a:latin typeface="Courier New" panose="02070309020205020404" pitchFamily="49" charset="0"/>
               <a:cs typeface="Courier New" panose="02070309020205020404" pitchFamily="49" charset="0"/>
             </a:endParaRPr>
@@ -6346,7 +6422,7 @@
         <p:spPr>
           <a:xfrm>
             <a:off x="8138160" y="2971800"/>
-            <a:ext cx="3063240" cy="1874520"/>
+            <a:ext cx="3520440" cy="1874520"/>
           </a:xfrm>
           <a:prstGeom prst="roundRect">
             <a:avLst>
@@ -6416,7 +6492,7 @@
         <p:spPr>
           <a:xfrm>
             <a:off x="8366760" y="3703320"/>
-            <a:ext cx="2651760" cy="777240"/>
+            <a:ext cx="3182112" cy="777240"/>
           </a:xfrm>
           <a:prstGeom prst="rect">
             <a:avLst/>
@@ -6432,7 +6508,7 @@
               <a:buNone/>
             </a:pPr>
             <a:r>
-              <a:rPr lang="en-US" sz="1350" noProof="1">
+              <a:rPr lang="en-US" sz="1300" noProof="1">
                 <a:solidFill>
                   <a:srgbClr val="F8FAFC"/>
                 </a:solidFill>
@@ -6440,16 +6516,16 @@
                 <a:ea typeface="Courier New" pitchFamily="34" charset="-122"/>
                 <a:cs typeface="Courier New" pitchFamily="34" charset="-120"/>
               </a:rPr>
-              <a:t>states.pt</a:t>
-            </a:r>
-            <a:endParaRPr lang="en-US" sz="1350" noProof="1"/>
+              <a:t>states.pt → board vectors</a:t>
+            </a:r>
+            <a:endParaRPr lang="en-US" sz="1300" noProof="1"/>
           </a:p>
           <a:p>
             <a:pPr marL="0" indent="0">
               <a:buNone/>
             </a:pPr>
             <a:r>
-              <a:rPr lang="en-US" sz="1350" noProof="1">
+              <a:rPr lang="en-US" sz="1300" noProof="1">
                 <a:solidFill>
                   <a:srgbClr val="F8FAFC"/>
                 </a:solidFill>
@@ -6457,16 +6533,16 @@
                 <a:ea typeface="Courier New" pitchFamily="34" charset="-122"/>
                 <a:cs typeface="Courier New" pitchFamily="34" charset="-120"/>
               </a:rPr>
-              <a:t>targets.pt</a:t>
-            </a:r>
-            <a:endParaRPr lang="en-US" sz="1350" noProof="1"/>
+              <a:t>targets.pt → scores for 8 moves</a:t>
+            </a:r>
+            <a:endParaRPr lang="en-US" sz="1300" noProof="1"/>
           </a:p>
           <a:p>
             <a:pPr marL="0" indent="0">
               <a:buNone/>
             </a:pPr>
             <a:r>
-              <a:rPr lang="en-US" sz="1350" noProof="1">
+              <a:rPr lang="en-US" sz="1300" noProof="1">
                 <a:solidFill>
                   <a:srgbClr val="F8FAFC"/>
                 </a:solidFill>
@@ -6474,16 +6550,13 @@
                 <a:ea typeface="Courier New" pitchFamily="34" charset="-122"/>
                 <a:cs typeface="Courier New" pitchFamily="34" charset="-120"/>
               </a:rPr>
-              <a:t>legal_masks.pt</a:t>
-            </a:r>
-            <a:endParaRPr lang="en-US" sz="1350" noProof="1"/>
-          </a:p>
-          <a:p>
-            <a:pPr marL="0" indent="0">
-              <a:buNone/>
-            </a:pPr>
-            <a:r>
-              <a:rPr lang="en-US" sz="1350" noProof="1">
+              <a:t>legal_masks.pt → legal move mask</a:t>
+            </a:r>
+            <a:endParaRPr lang="en-US" sz="1300" noProof="1"/>
+          </a:p>
+          <a:p>
+            <a:r>
+              <a:rPr lang="en-US" sz="1300" noProof="1">
                 <a:solidFill>
                   <a:srgbClr val="F8FAFC"/>
                 </a:solidFill>
@@ -6491,9 +6564,9 @@
                 <a:ea typeface="Courier New" pitchFamily="34" charset="-122"/>
                 <a:cs typeface="Courier New" pitchFamily="34" charset="-120"/>
               </a:rPr>
-              <a:t>best_moves.pt</a:t>
-            </a:r>
-            <a:endParaRPr lang="en-US" sz="1350" noProof="1"/>
+              <a:t>best_moves.pt → best search move</a:t>
+            </a:r>
+            <a:endParaRPr lang="en-US" sz="1300" noProof="1"/>
           </a:p>
         </p:txBody>
       </p:sp>
@@ -7689,7 +7762,7 @@
                   <a:srgbClr val="F8FAFC"/>
                 </a:solidFill>
               </a:rPr>
-              <a:t>The model is trained to choose moves, not predict the winner.</a:t>
+              <a:t>Loss = 0.8 soft target loss + 0.2 hard CE loss</a:t>
             </a:r>
             <a:endParaRPr lang="en-US" sz="1300" noProof="1"/>
           </a:p>
